--- a/2.studyUnity1(2D)/Ge1_1_Transform.pptx
+++ b/2.studyUnity1(2D)/Ge1_1_Transform.pptx
@@ -5,7 +5,7 @@
     <p:sldMasterId id="2147483677" r:id="rId1"/>
   </p:sldMasterIdLst>
   <p:notesMasterIdLst>
-    <p:notesMasterId r:id="rId23"/>
+    <p:notesMasterId r:id="rId22"/>
   </p:notesMasterIdLst>
   <p:sldIdLst>
     <p:sldId id="256" r:id="rId2"/>
@@ -27,8 +27,7 @@
     <p:sldId id="302" r:id="rId18"/>
     <p:sldId id="303" r:id="rId19"/>
     <p:sldId id="304" r:id="rId20"/>
-    <p:sldId id="277" r:id="rId21"/>
-    <p:sldId id="265" r:id="rId22"/>
+    <p:sldId id="265" r:id="rId21"/>
   </p:sldIdLst>
   <p:sldSz cx="12192000" cy="6858000"/>
   <p:notesSz cx="6858000" cy="9144000"/>
@@ -155,7 +154,6 @@
         </p14:section>
         <p14:section name="タイトルなしのセクション" id="{67906BAD-F031-497A-B245-00DC540EA77E}">
           <p14:sldIdLst>
-            <p14:sldId id="277"/>
             <p14:sldId id="265"/>
           </p14:sldIdLst>
         </p14:section>
@@ -269,7 +267,7 @@
           <a:p>
             <a:fld id="{C9C3C1B3-0E61-4942-A09A-02F2EAE54150}" type="datetimeFigureOut">
               <a:rPr kumimoji="1" lang="ja-JP" altLang="en-US" smtClean="0"/>
-              <a:t>2024/7/11</a:t>
+              <a:t>2025/7/2</a:t>
             </a:fld>
             <a:endParaRPr kumimoji="1" lang="ja-JP" altLang="en-US"/>
           </a:p>
@@ -715,7 +713,7 @@
           <a:p>
             <a:fld id="{691E08CE-871E-42A1-882B-8194E9FA60B7}" type="datetimeFigureOut">
               <a:rPr kumimoji="1" lang="ja-JP" altLang="en-US" smtClean="0"/>
-              <a:t>2024/7/11</a:t>
+              <a:t>2025/7/2</a:t>
             </a:fld>
             <a:endParaRPr kumimoji="1" lang="ja-JP" altLang="en-US"/>
           </a:p>
@@ -945,7 +943,7 @@
           <a:p>
             <a:fld id="{691E08CE-871E-42A1-882B-8194E9FA60B7}" type="datetimeFigureOut">
               <a:rPr kumimoji="1" lang="ja-JP" altLang="en-US" smtClean="0"/>
-              <a:t>2024/7/11</a:t>
+              <a:t>2025/7/2</a:t>
             </a:fld>
             <a:endParaRPr kumimoji="1" lang="ja-JP" altLang="en-US"/>
           </a:p>
@@ -1185,7 +1183,7 @@
           <a:p>
             <a:fld id="{691E08CE-871E-42A1-882B-8194E9FA60B7}" type="datetimeFigureOut">
               <a:rPr kumimoji="1" lang="ja-JP" altLang="en-US" smtClean="0"/>
-              <a:t>2024/7/11</a:t>
+              <a:t>2025/7/2</a:t>
             </a:fld>
             <a:endParaRPr kumimoji="1" lang="ja-JP" altLang="en-US"/>
           </a:p>
@@ -1415,7 +1413,7 @@
           <a:p>
             <a:fld id="{691E08CE-871E-42A1-882B-8194E9FA60B7}" type="datetimeFigureOut">
               <a:rPr kumimoji="1" lang="ja-JP" altLang="en-US" smtClean="0"/>
-              <a:t>2024/7/11</a:t>
+              <a:t>2025/7/2</a:t>
             </a:fld>
             <a:endParaRPr kumimoji="1" lang="ja-JP" altLang="en-US"/>
           </a:p>
@@ -1690,7 +1688,7 @@
           <a:p>
             <a:fld id="{691E08CE-871E-42A1-882B-8194E9FA60B7}" type="datetimeFigureOut">
               <a:rPr kumimoji="1" lang="ja-JP" altLang="en-US" smtClean="0"/>
-              <a:t>2024/7/11</a:t>
+              <a:t>2025/7/2</a:t>
             </a:fld>
             <a:endParaRPr kumimoji="1" lang="ja-JP" altLang="en-US"/>
           </a:p>
@@ -2019,7 +2017,7 @@
           <a:p>
             <a:fld id="{691E08CE-871E-42A1-882B-8194E9FA60B7}" type="datetimeFigureOut">
               <a:rPr kumimoji="1" lang="ja-JP" altLang="en-US" smtClean="0"/>
-              <a:t>2024/7/11</a:t>
+              <a:t>2025/7/2</a:t>
             </a:fld>
             <a:endParaRPr kumimoji="1" lang="ja-JP" altLang="en-US"/>
           </a:p>
@@ -2495,7 +2493,7 @@
           <a:p>
             <a:fld id="{691E08CE-871E-42A1-882B-8194E9FA60B7}" type="datetimeFigureOut">
               <a:rPr kumimoji="1" lang="ja-JP" altLang="en-US" smtClean="0"/>
-              <a:t>2024/7/11</a:t>
+              <a:t>2025/7/2</a:t>
             </a:fld>
             <a:endParaRPr kumimoji="1" lang="ja-JP" altLang="en-US"/>
           </a:p>
@@ -2636,7 +2634,7 @@
           <a:p>
             <a:fld id="{691E08CE-871E-42A1-882B-8194E9FA60B7}" type="datetimeFigureOut">
               <a:rPr kumimoji="1" lang="ja-JP" altLang="en-US" smtClean="0"/>
-              <a:t>2024/7/11</a:t>
+              <a:t>2025/7/2</a:t>
             </a:fld>
             <a:endParaRPr kumimoji="1" lang="ja-JP" altLang="en-US"/>
           </a:p>
@@ -2749,7 +2747,7 @@
           <a:p>
             <a:fld id="{691E08CE-871E-42A1-882B-8194E9FA60B7}" type="datetimeFigureOut">
               <a:rPr kumimoji="1" lang="ja-JP" altLang="en-US" smtClean="0"/>
-              <a:t>2024/7/11</a:t>
+              <a:t>2025/7/2</a:t>
             </a:fld>
             <a:endParaRPr kumimoji="1" lang="ja-JP" altLang="en-US"/>
           </a:p>
@@ -3092,7 +3090,7 @@
           <a:p>
             <a:fld id="{691E08CE-871E-42A1-882B-8194E9FA60B7}" type="datetimeFigureOut">
               <a:rPr kumimoji="1" lang="ja-JP" altLang="en-US" smtClean="0"/>
-              <a:t>2024/7/11</a:t>
+              <a:t>2025/7/2</a:t>
             </a:fld>
             <a:endParaRPr kumimoji="1" lang="ja-JP" altLang="en-US"/>
           </a:p>
@@ -3380,7 +3378,7 @@
           <a:p>
             <a:fld id="{691E08CE-871E-42A1-882B-8194E9FA60B7}" type="datetimeFigureOut">
               <a:rPr kumimoji="1" lang="ja-JP" altLang="en-US" smtClean="0"/>
-              <a:t>2024/7/11</a:t>
+              <a:t>2025/7/2</a:t>
             </a:fld>
             <a:endParaRPr kumimoji="1" lang="ja-JP" altLang="en-US"/>
           </a:p>
@@ -3653,7 +3651,7 @@
           <a:p>
             <a:fld id="{691E08CE-871E-42A1-882B-8194E9FA60B7}" type="datetimeFigureOut">
               <a:rPr kumimoji="1" lang="ja-JP" altLang="en-US" smtClean="0"/>
-              <a:t>2024/7/11</a:t>
+              <a:t>2025/7/2</a:t>
             </a:fld>
             <a:endParaRPr kumimoji="1" lang="ja-JP" altLang="en-US"/>
           </a:p>
@@ -4136,7 +4134,7 @@
           <a:p>
             <a:r>
               <a:rPr lang="en-US" altLang="ja-JP" sz="6600" dirty="0" err="1"/>
-              <a:t>TransFrom</a:t>
+              <a:t>TransForm</a:t>
             </a:r>
             <a:endParaRPr kumimoji="1" lang="ja-JP" altLang="en-US" sz="4400" dirty="0"/>
           </a:p>
@@ -11441,29 +11439,8 @@
             </a:pPr>
             <a:r>
               <a:rPr lang="ja-JP" altLang="en-US" sz="3200" dirty="0"/>
-              <a:t>　・有</a:t>
-            </a:r>
-            <a:r>
-              <a:rPr lang="en-US" altLang="ja-JP" sz="3200" dirty="0"/>
-              <a:t>(</a:t>
-            </a:r>
-            <a:r>
-              <a:rPr lang="ja-JP" altLang="en-US" sz="3200" dirty="0"/>
-              <a:t>スライド最後</a:t>
-            </a:r>
-            <a:r>
-              <a:rPr lang="en-US" altLang="ja-JP" sz="3200" dirty="0"/>
-              <a:t>)</a:t>
-            </a:r>
-          </a:p>
-          <a:p>
-            <a:endParaRPr lang="en-US" altLang="ja-JP" sz="3200" dirty="0"/>
-          </a:p>
-          <a:p>
-            <a:pPr marL="0" indent="0">
-              <a:buNone/>
-            </a:pPr>
-            <a:endParaRPr lang="ja-JP" altLang="en-US" sz="3200" dirty="0"/>
+              <a:t>　・無し</a:t>
+            </a:r>
           </a:p>
         </p:txBody>
       </p:sp>
@@ -11499,10 +11476,10 @@
       </p:grpSpPr>
       <p:pic>
         <p:nvPicPr>
-          <p:cNvPr id="8" name="図 7">
-            <a:extLst>
-              <a:ext uri="{FF2B5EF4-FFF2-40B4-BE49-F238E27FC236}">
-                <a16:creationId xmlns:a16="http://schemas.microsoft.com/office/drawing/2014/main" id="{3FE450E9-4586-4B48-972D-14C9C040F256}"/>
+          <p:cNvPr id="15" name="図 14">
+            <a:extLst>
+              <a:ext uri="{FF2B5EF4-FFF2-40B4-BE49-F238E27FC236}">
+                <a16:creationId xmlns:a16="http://schemas.microsoft.com/office/drawing/2014/main" id="{9FD2C736-3AF5-4B4E-8A54-DE65D4C3BB67}"/>
               </a:ext>
             </a:extLst>
           </p:cNvPr>
@@ -11565,449 +11542,6 @@
       </p:pic>
       <p:sp>
         <p:nvSpPr>
-          <p:cNvPr id="10" name="タイトル 1">
-            <a:extLst>
-              <a:ext uri="{FF2B5EF4-FFF2-40B4-BE49-F238E27FC236}">
-                <a16:creationId xmlns:a16="http://schemas.microsoft.com/office/drawing/2014/main" id="{552304C8-A1DE-4E8B-BA5F-60F1BC1D2390}"/>
-              </a:ext>
-            </a:extLst>
-          </p:cNvPr>
-          <p:cNvSpPr txBox="1">
-            <a:spLocks/>
-          </p:cNvSpPr>
-          <p:nvPr/>
-        </p:nvSpPr>
-        <p:spPr>
-          <a:xfrm>
-            <a:off x="276061" y="287867"/>
-            <a:ext cx="8596668" cy="660400"/>
-          </a:xfrm>
-          <a:prstGeom prst="rect">
-            <a:avLst/>
-          </a:prstGeom>
-        </p:spPr>
-        <p:txBody>
-          <a:bodyPr vert="horz" lIns="91440" tIns="45720" rIns="91440" bIns="45720" rtlCol="0" anchor="t">
-            <a:normAutofit/>
-          </a:bodyPr>
-          <a:lstStyle>
-            <a:lvl1pPr algn="l" defTabSz="457200" rtl="0" eaLnBrk="1" latinLnBrk="0" hangingPunct="1">
-              <a:spcBef>
-                <a:spcPct val="0"/>
-              </a:spcBef>
-              <a:buNone/>
-              <a:defRPr kumimoji="1" sz="3600" kern="1200">
-                <a:solidFill>
-                  <a:schemeClr val="accent1"/>
-                </a:solidFill>
-                <a:latin typeface="+mj-lt"/>
-                <a:ea typeface="+mj-ea"/>
-                <a:cs typeface="+mj-cs"/>
-              </a:defRPr>
-            </a:lvl1pPr>
-            <a:lvl2pPr eaLnBrk="1" hangingPunct="1">
-              <a:defRPr kumimoji="1">
-                <a:solidFill>
-                  <a:schemeClr val="tx2"/>
-                </a:solidFill>
-              </a:defRPr>
-            </a:lvl2pPr>
-            <a:lvl3pPr eaLnBrk="1" hangingPunct="1">
-              <a:defRPr kumimoji="1">
-                <a:solidFill>
-                  <a:schemeClr val="tx2"/>
-                </a:solidFill>
-              </a:defRPr>
-            </a:lvl3pPr>
-            <a:lvl4pPr eaLnBrk="1" hangingPunct="1">
-              <a:defRPr kumimoji="1">
-                <a:solidFill>
-                  <a:schemeClr val="tx2"/>
-                </a:solidFill>
-              </a:defRPr>
-            </a:lvl4pPr>
-            <a:lvl5pPr eaLnBrk="1" hangingPunct="1">
-              <a:defRPr kumimoji="1">
-                <a:solidFill>
-                  <a:schemeClr val="tx2"/>
-                </a:solidFill>
-              </a:defRPr>
-            </a:lvl5pPr>
-            <a:lvl6pPr eaLnBrk="1" hangingPunct="1">
-              <a:defRPr kumimoji="1">
-                <a:solidFill>
-                  <a:schemeClr val="tx2"/>
-                </a:solidFill>
-              </a:defRPr>
-            </a:lvl6pPr>
-            <a:lvl7pPr eaLnBrk="1" hangingPunct="1">
-              <a:defRPr kumimoji="1">
-                <a:solidFill>
-                  <a:schemeClr val="tx2"/>
-                </a:solidFill>
-              </a:defRPr>
-            </a:lvl7pPr>
-            <a:lvl8pPr eaLnBrk="1" hangingPunct="1">
-              <a:defRPr kumimoji="1">
-                <a:solidFill>
-                  <a:schemeClr val="tx2"/>
-                </a:solidFill>
-              </a:defRPr>
-            </a:lvl8pPr>
-            <a:lvl9pPr eaLnBrk="1" hangingPunct="1">
-              <a:defRPr kumimoji="1">
-                <a:solidFill>
-                  <a:schemeClr val="tx2"/>
-                </a:solidFill>
-              </a:defRPr>
-            </a:lvl9pPr>
-          </a:lstStyle>
-          <a:p>
-            <a:r>
-              <a:rPr lang="ja-JP" altLang="en-US" sz="3200" dirty="0">
-                <a:solidFill>
-                  <a:schemeClr val="tx1"/>
-                </a:solidFill>
-              </a:rPr>
-              <a:t>課題：クッキークリッカーもどきの作成</a:t>
-            </a:r>
-          </a:p>
-        </p:txBody>
-      </p:sp>
-      <p:sp>
-        <p:nvSpPr>
-          <p:cNvPr id="5" name="テキスト ボックス 4">
-            <a:extLst>
-              <a:ext uri="{FF2B5EF4-FFF2-40B4-BE49-F238E27FC236}">
-                <a16:creationId xmlns:a16="http://schemas.microsoft.com/office/drawing/2014/main" id="{173EE6D7-EC19-4EFE-AFD0-5D75D3BB9E0E}"/>
-              </a:ext>
-            </a:extLst>
-          </p:cNvPr>
-          <p:cNvSpPr txBox="1"/>
-          <p:nvPr/>
-        </p:nvSpPr>
-        <p:spPr>
-          <a:xfrm>
-            <a:off x="4574395" y="6110185"/>
-            <a:ext cx="8040503" cy="646331"/>
-          </a:xfrm>
-          <a:prstGeom prst="rect">
-            <a:avLst/>
-          </a:prstGeom>
-          <a:noFill/>
-        </p:spPr>
-        <p:txBody>
-          <a:bodyPr wrap="square">
-            <a:spAutoFit/>
-          </a:bodyPr>
-          <a:lstStyle/>
-          <a:p>
-            <a:r>
-              <a:rPr lang="ja-JP" altLang="en-US" dirty="0"/>
-              <a:t>乱数の生成：</a:t>
-            </a:r>
-            <a:endParaRPr lang="en-US" altLang="ja-JP" dirty="0"/>
-          </a:p>
-          <a:p>
-            <a:r>
-              <a:rPr lang="en-US" altLang="ja-JP" dirty="0"/>
-              <a:t>https://tech.pjin.jp/blog/2021/03/31/unity_howto_random/</a:t>
-            </a:r>
-            <a:endParaRPr lang="ja-JP" altLang="en-US" dirty="0"/>
-          </a:p>
-        </p:txBody>
-      </p:sp>
-      <p:pic>
-        <p:nvPicPr>
-          <p:cNvPr id="4" name="図 3">
-            <a:extLst>
-              <a:ext uri="{FF2B5EF4-FFF2-40B4-BE49-F238E27FC236}">
-                <a16:creationId xmlns:a16="http://schemas.microsoft.com/office/drawing/2014/main" id="{6AC9FA87-FFE4-4122-A688-D2F481D4824E}"/>
-              </a:ext>
-            </a:extLst>
-          </p:cNvPr>
-          <p:cNvPicPr>
-            <a:picLocks noChangeAspect="1"/>
-          </p:cNvPicPr>
-          <p:nvPr/>
-        </p:nvPicPr>
-        <p:blipFill>
-          <a:blip r:embed="rId3">
-            <a:extLst>
-              <a:ext uri="{28A0092B-C50C-407E-A947-70E740481C1C}">
-                <a14:useLocalDpi xmlns:a14="http://schemas.microsoft.com/office/drawing/2010/main" val="0"/>
-              </a:ext>
-            </a:extLst>
-          </a:blip>
-          <a:stretch>
-            <a:fillRect/>
-          </a:stretch>
-        </p:blipFill>
-        <p:spPr>
-          <a:xfrm>
-            <a:off x="4277454" y="2766115"/>
-            <a:ext cx="7803034" cy="3207231"/>
-          </a:xfrm>
-          <a:prstGeom prst="rect">
-            <a:avLst/>
-          </a:prstGeom>
-        </p:spPr>
-      </p:pic>
-      <p:sp>
-        <p:nvSpPr>
-          <p:cNvPr id="6" name="テキスト ボックス 5">
-            <a:extLst>
-              <a:ext uri="{FF2B5EF4-FFF2-40B4-BE49-F238E27FC236}">
-                <a16:creationId xmlns:a16="http://schemas.microsoft.com/office/drawing/2014/main" id="{5598560C-484B-47A5-B04F-F565D1D473D7}"/>
-              </a:ext>
-            </a:extLst>
-          </p:cNvPr>
-          <p:cNvSpPr txBox="1"/>
-          <p:nvPr/>
-        </p:nvSpPr>
-        <p:spPr>
-          <a:xfrm>
-            <a:off x="2997825" y="1848467"/>
-            <a:ext cx="6955750" cy="830997"/>
-          </a:xfrm>
-          <a:prstGeom prst="rect">
-            <a:avLst/>
-          </a:prstGeom>
-          <a:noFill/>
-        </p:spPr>
-        <p:txBody>
-          <a:bodyPr wrap="none" rtlCol="0">
-            <a:spAutoFit/>
-          </a:bodyPr>
-          <a:lstStyle/>
-          <a:p>
-            <a:r>
-              <a:rPr kumimoji="1" lang="en-US" altLang="ja-JP" sz="2400" dirty="0"/>
-              <a:t>Prefab</a:t>
-            </a:r>
-            <a:r>
-              <a:rPr kumimoji="1" lang="ja-JP" altLang="en-US" sz="2400" dirty="0"/>
-              <a:t>などでの複製や</a:t>
-            </a:r>
-            <a:endParaRPr kumimoji="1" lang="en-US" altLang="ja-JP" sz="2400" dirty="0"/>
-          </a:p>
-          <a:p>
-            <a:r>
-              <a:rPr kumimoji="1" lang="ja-JP" altLang="en-US" sz="2400" dirty="0"/>
-              <a:t>オブジェクトの削除などは行ってはいけません。</a:t>
-            </a:r>
-          </a:p>
-        </p:txBody>
-      </p:sp>
-      <p:sp>
-        <p:nvSpPr>
-          <p:cNvPr id="7" name="テキスト ボックス 6">
-            <a:extLst>
-              <a:ext uri="{FF2B5EF4-FFF2-40B4-BE49-F238E27FC236}">
-                <a16:creationId xmlns:a16="http://schemas.microsoft.com/office/drawing/2014/main" id="{6D481F4F-8AA2-4E71-919B-8430524F502F}"/>
-              </a:ext>
-            </a:extLst>
-          </p:cNvPr>
-          <p:cNvSpPr txBox="1"/>
-          <p:nvPr/>
-        </p:nvSpPr>
-        <p:spPr>
-          <a:xfrm>
-            <a:off x="1887935" y="967423"/>
-            <a:ext cx="7354899" cy="954107"/>
-          </a:xfrm>
-          <a:prstGeom prst="rect">
-            <a:avLst/>
-          </a:prstGeom>
-        </p:spPr>
-        <p:style>
-          <a:lnRef idx="2">
-            <a:schemeClr val="accent1"/>
-          </a:lnRef>
-          <a:fillRef idx="1">
-            <a:schemeClr val="lt1"/>
-          </a:fillRef>
-          <a:effectRef idx="0">
-            <a:schemeClr val="accent1"/>
-          </a:effectRef>
-          <a:fontRef idx="minor">
-            <a:schemeClr val="dk1"/>
-          </a:fontRef>
-        </p:style>
-        <p:txBody>
-          <a:bodyPr wrap="none" rtlCol="0">
-            <a:spAutoFit/>
-          </a:bodyPr>
-          <a:lstStyle/>
-          <a:p>
-            <a:r>
-              <a:rPr lang="en-US" altLang="ja-JP" sz="2800" dirty="0" err="1"/>
-              <a:t>Github</a:t>
-            </a:r>
-            <a:r>
-              <a:rPr lang="ja-JP" altLang="en-US" sz="2800" dirty="0"/>
-              <a:t>上</a:t>
-            </a:r>
-            <a:r>
-              <a:rPr kumimoji="1" lang="ja-JP" altLang="en-US" sz="2800" dirty="0"/>
-              <a:t>：課題仕様書</a:t>
-            </a:r>
-            <a:r>
-              <a:rPr kumimoji="1" lang="en-US" altLang="ja-JP" sz="2800" dirty="0"/>
-              <a:t>_</a:t>
-            </a:r>
-            <a:r>
-              <a:rPr kumimoji="1" lang="ja-JP" altLang="en-US" sz="2800"/>
-              <a:t>ゲームエンジン</a:t>
-            </a:r>
-            <a:r>
-              <a:rPr kumimoji="1" lang="en-US" altLang="ja-JP" sz="2800" dirty="0"/>
-              <a:t>1for2</a:t>
-            </a:r>
-          </a:p>
-          <a:p>
-            <a:pPr algn="ctr"/>
-            <a:r>
-              <a:rPr lang="en-US" altLang="ja-JP" sz="2800" dirty="0"/>
-              <a:t>(Cookie1)</a:t>
-            </a:r>
-            <a:endParaRPr kumimoji="1" lang="ja-JP" altLang="en-US" dirty="0"/>
-          </a:p>
-        </p:txBody>
-      </p:sp>
-      <p:sp>
-        <p:nvSpPr>
-          <p:cNvPr id="11" name="テキスト ボックス 10">
-            <a:extLst>
-              <a:ext uri="{FF2B5EF4-FFF2-40B4-BE49-F238E27FC236}">
-                <a16:creationId xmlns:a16="http://schemas.microsoft.com/office/drawing/2014/main" id="{4492ACEC-91C3-49CF-89C9-AF7E4F47DA04}"/>
-              </a:ext>
-            </a:extLst>
-          </p:cNvPr>
-          <p:cNvSpPr txBox="1"/>
-          <p:nvPr/>
-        </p:nvSpPr>
-        <p:spPr>
-          <a:xfrm>
-            <a:off x="889802" y="4018782"/>
-            <a:ext cx="1723549" cy="707886"/>
-          </a:xfrm>
-          <a:prstGeom prst="rect">
-            <a:avLst/>
-          </a:prstGeom>
-          <a:noFill/>
-        </p:spPr>
-        <p:txBody>
-          <a:bodyPr wrap="none" rtlCol="0">
-            <a:spAutoFit/>
-          </a:bodyPr>
-          <a:lstStyle/>
-          <a:p>
-            <a:r>
-              <a:rPr kumimoji="1" lang="ja-JP" altLang="en-US" sz="4000" dirty="0"/>
-              <a:t>ヒント</a:t>
-            </a:r>
-          </a:p>
-        </p:txBody>
-      </p:sp>
-    </p:spTree>
-    <p:extLst>
-      <p:ext uri="{BB962C8B-B14F-4D97-AF65-F5344CB8AC3E}">
-        <p14:creationId xmlns:p14="http://schemas.microsoft.com/office/powerpoint/2010/main" val="2760010478"/>
-      </p:ext>
-    </p:extLst>
-  </p:cSld>
-  <p:clrMapOvr>
-    <a:masterClrMapping/>
-  </p:clrMapOvr>
-</p:sld>
-</file>
-
-<file path=ppt/slides/slide21.xml><?xml version="1.0" encoding="utf-8"?>
-<p:sld xmlns:a="http://schemas.openxmlformats.org/drawingml/2006/main" xmlns:r="http://schemas.openxmlformats.org/officeDocument/2006/relationships" xmlns:p="http://schemas.openxmlformats.org/presentationml/2006/main">
-  <p:cSld>
-    <p:spTree>
-      <p:nvGrpSpPr>
-        <p:cNvPr id="1" name=""/>
-        <p:cNvGrpSpPr/>
-        <p:nvPr/>
-      </p:nvGrpSpPr>
-      <p:grpSpPr>
-        <a:xfrm>
-          <a:off x="0" y="0"/>
-          <a:ext cx="0" cy="0"/>
-          <a:chOff x="0" y="0"/>
-          <a:chExt cx="0" cy="0"/>
-        </a:xfrm>
-      </p:grpSpPr>
-      <p:pic>
-        <p:nvPicPr>
-          <p:cNvPr id="15" name="図 14">
-            <a:extLst>
-              <a:ext uri="{FF2B5EF4-FFF2-40B4-BE49-F238E27FC236}">
-                <a16:creationId xmlns:a16="http://schemas.microsoft.com/office/drawing/2014/main" id="{9FD2C736-3AF5-4B4E-8A54-DE65D4C3BB67}"/>
-              </a:ext>
-            </a:extLst>
-          </p:cNvPr>
-          <p:cNvPicPr>
-            <a:picLocks noChangeAspect="1"/>
-          </p:cNvPicPr>
-          <p:nvPr/>
-        </p:nvPicPr>
-        <p:blipFill>
-          <a:blip r:embed="rId2">
-            <a:extLst>
-              <a:ext uri="{28A0092B-C50C-407E-A947-70E740481C1C}">
-                <a14:useLocalDpi xmlns:a14="http://schemas.microsoft.com/office/drawing/2010/main" val="0"/>
-              </a:ext>
-            </a:extLst>
-          </a:blip>
-          <a:stretch>
-            <a:fillRect/>
-          </a:stretch>
-        </p:blipFill>
-        <p:spPr>
-          <a:xfrm>
-            <a:off x="9539909" y="101484"/>
-            <a:ext cx="2540579" cy="508116"/>
-          </a:xfrm>
-          <a:prstGeom prst="snip2DiagRect">
-            <a:avLst/>
-          </a:prstGeom>
-          <a:solidFill>
-            <a:srgbClr val="FFFFFF">
-              <a:shade val="85000"/>
-            </a:srgbClr>
-          </a:solidFill>
-          <a:ln w="88900" cap="sq">
-            <a:solidFill>
-              <a:srgbClr val="FFFFFF"/>
-            </a:solidFill>
-            <a:miter lim="800000"/>
-          </a:ln>
-          <a:effectLst>
-            <a:outerShdw blurRad="88900" algn="tl" rotWithShape="0">
-              <a:srgbClr val="000000">
-                <a:alpha val="45000"/>
-              </a:srgbClr>
-            </a:outerShdw>
-          </a:effectLst>
-          <a:scene3d>
-            <a:camera prst="orthographicFront"/>
-            <a:lightRig rig="twoPt" dir="t">
-              <a:rot lat="0" lon="0" rev="7200000"/>
-            </a:lightRig>
-          </a:scene3d>
-          <a:sp3d>
-            <a:bevelT w="25400" h="19050"/>
-            <a:contourClr>
-              <a:srgbClr val="FFFFFF"/>
-            </a:contourClr>
-          </a:sp3d>
-        </p:spPr>
-      </p:pic>
-      <p:sp>
-        <p:nvSpPr>
           <p:cNvPr id="8" name="タイトル 1">
             <a:extLst>
               <a:ext uri="{FF2B5EF4-FFF2-40B4-BE49-F238E27FC236}">
@@ -12062,316 +11596,6 @@
       </p:sp>
       <p:sp>
         <p:nvSpPr>
-          <p:cNvPr id="6" name="コンテンツ プレースホルダー 2">
-            <a:extLst>
-              <a:ext uri="{FF2B5EF4-FFF2-40B4-BE49-F238E27FC236}">
-                <a16:creationId xmlns:a16="http://schemas.microsoft.com/office/drawing/2014/main" id="{9833EB74-73B2-43EE-B1C0-CCF48283D1C4}"/>
-              </a:ext>
-            </a:extLst>
-          </p:cNvPr>
-          <p:cNvSpPr txBox="1">
-            <a:spLocks/>
-          </p:cNvSpPr>
-          <p:nvPr/>
-        </p:nvSpPr>
-        <p:spPr>
-          <a:xfrm>
-            <a:off x="7519048" y="889721"/>
-            <a:ext cx="4112817" cy="2329339"/>
-          </a:xfrm>
-          <a:prstGeom prst="rect">
-            <a:avLst/>
-          </a:prstGeom>
-        </p:spPr>
-        <p:txBody>
-          <a:bodyPr vert="horz" lIns="91440" tIns="45720" rIns="91440" bIns="45720" rtlCol="0">
-            <a:normAutofit/>
-          </a:bodyPr>
-          <a:lstStyle>
-            <a:lvl1pPr marL="342900" indent="-342900" algn="l" defTabSz="457200" rtl="0" eaLnBrk="1" latinLnBrk="0" hangingPunct="1">
-              <a:spcBef>
-                <a:spcPts val="1000"/>
-              </a:spcBef>
-              <a:spcAft>
-                <a:spcPts val="0"/>
-              </a:spcAft>
-              <a:buClr>
-                <a:schemeClr val="accent1"/>
-              </a:buClr>
-              <a:buSzPct val="80000"/>
-              <a:buFont typeface="Wingdings 3" charset="2"/>
-              <a:buChar char=""/>
-              <a:defRPr kumimoji="1" sz="1800" kern="1200">
-                <a:solidFill>
-                  <a:schemeClr val="tx1">
-                    <a:lumMod val="75000"/>
-                    <a:lumOff val="25000"/>
-                  </a:schemeClr>
-                </a:solidFill>
-                <a:latin typeface="+mn-lt"/>
-                <a:ea typeface="+mn-ea"/>
-                <a:cs typeface="+mn-cs"/>
-              </a:defRPr>
-            </a:lvl1pPr>
-            <a:lvl2pPr marL="742950" indent="-285750" algn="l" defTabSz="457200" rtl="0" eaLnBrk="1" latinLnBrk="0" hangingPunct="1">
-              <a:spcBef>
-                <a:spcPts val="1000"/>
-              </a:spcBef>
-              <a:spcAft>
-                <a:spcPts val="0"/>
-              </a:spcAft>
-              <a:buClr>
-                <a:schemeClr val="accent1"/>
-              </a:buClr>
-              <a:buSzPct val="80000"/>
-              <a:buFont typeface="Wingdings 3" charset="2"/>
-              <a:buChar char=""/>
-              <a:defRPr kumimoji="1" sz="1600" kern="1200">
-                <a:solidFill>
-                  <a:schemeClr val="tx1">
-                    <a:lumMod val="75000"/>
-                    <a:lumOff val="25000"/>
-                  </a:schemeClr>
-                </a:solidFill>
-                <a:latin typeface="+mn-lt"/>
-                <a:ea typeface="+mn-ea"/>
-                <a:cs typeface="+mn-cs"/>
-              </a:defRPr>
-            </a:lvl2pPr>
-            <a:lvl3pPr marL="1143000" indent="-228600" algn="l" defTabSz="457200" rtl="0" eaLnBrk="1" latinLnBrk="0" hangingPunct="1">
-              <a:spcBef>
-                <a:spcPts val="1000"/>
-              </a:spcBef>
-              <a:spcAft>
-                <a:spcPts val="0"/>
-              </a:spcAft>
-              <a:buClr>
-                <a:schemeClr val="accent1"/>
-              </a:buClr>
-              <a:buSzPct val="80000"/>
-              <a:buFont typeface="Wingdings 3" charset="2"/>
-              <a:buChar char=""/>
-              <a:defRPr kumimoji="1" sz="1400" kern="1200">
-                <a:solidFill>
-                  <a:schemeClr val="tx1">
-                    <a:lumMod val="75000"/>
-                    <a:lumOff val="25000"/>
-                  </a:schemeClr>
-                </a:solidFill>
-                <a:latin typeface="+mn-lt"/>
-                <a:ea typeface="+mn-ea"/>
-                <a:cs typeface="+mn-cs"/>
-              </a:defRPr>
-            </a:lvl3pPr>
-            <a:lvl4pPr marL="1600200" indent="-228600" algn="l" defTabSz="457200" rtl="0" eaLnBrk="1" latinLnBrk="0" hangingPunct="1">
-              <a:spcBef>
-                <a:spcPts val="1000"/>
-              </a:spcBef>
-              <a:spcAft>
-                <a:spcPts val="0"/>
-              </a:spcAft>
-              <a:buClr>
-                <a:schemeClr val="accent1"/>
-              </a:buClr>
-              <a:buSzPct val="80000"/>
-              <a:buFont typeface="Wingdings 3" charset="2"/>
-              <a:buChar char=""/>
-              <a:defRPr kumimoji="1" sz="1200" kern="1200">
-                <a:solidFill>
-                  <a:schemeClr val="tx1">
-                    <a:lumMod val="75000"/>
-                    <a:lumOff val="25000"/>
-                  </a:schemeClr>
-                </a:solidFill>
-                <a:latin typeface="+mn-lt"/>
-                <a:ea typeface="+mn-ea"/>
-                <a:cs typeface="+mn-cs"/>
-              </a:defRPr>
-            </a:lvl4pPr>
-            <a:lvl5pPr marL="2057400" indent="-228600" algn="l" defTabSz="457200" rtl="0" eaLnBrk="1" latinLnBrk="0" hangingPunct="1">
-              <a:spcBef>
-                <a:spcPts val="1000"/>
-              </a:spcBef>
-              <a:spcAft>
-                <a:spcPts val="0"/>
-              </a:spcAft>
-              <a:buClr>
-                <a:schemeClr val="accent1"/>
-              </a:buClr>
-              <a:buSzPct val="80000"/>
-              <a:buFont typeface="Wingdings 3" charset="2"/>
-              <a:buChar char=""/>
-              <a:defRPr kumimoji="1" sz="1200" kern="1200">
-                <a:solidFill>
-                  <a:schemeClr val="tx1">
-                    <a:lumMod val="75000"/>
-                    <a:lumOff val="25000"/>
-                  </a:schemeClr>
-                </a:solidFill>
-                <a:latin typeface="+mn-lt"/>
-                <a:ea typeface="+mn-ea"/>
-                <a:cs typeface="+mn-cs"/>
-              </a:defRPr>
-            </a:lvl5pPr>
-            <a:lvl6pPr marL="2514600" indent="-228600" algn="l" defTabSz="457200" rtl="0" eaLnBrk="1" latinLnBrk="0" hangingPunct="1">
-              <a:spcBef>
-                <a:spcPts val="1000"/>
-              </a:spcBef>
-              <a:spcAft>
-                <a:spcPts val="0"/>
-              </a:spcAft>
-              <a:buClr>
-                <a:schemeClr val="accent1"/>
-              </a:buClr>
-              <a:buSzPct val="80000"/>
-              <a:buFont typeface="Wingdings 3" charset="2"/>
-              <a:buChar char=""/>
-              <a:defRPr kumimoji="1" sz="1200" kern="1200">
-                <a:solidFill>
-                  <a:schemeClr val="tx1">
-                    <a:lumMod val="75000"/>
-                    <a:lumOff val="25000"/>
-                  </a:schemeClr>
-                </a:solidFill>
-                <a:latin typeface="+mn-lt"/>
-                <a:ea typeface="+mn-ea"/>
-                <a:cs typeface="+mn-cs"/>
-              </a:defRPr>
-            </a:lvl6pPr>
-            <a:lvl7pPr marL="2971800" indent="-228600" algn="l" defTabSz="457200" rtl="0" eaLnBrk="1" latinLnBrk="0" hangingPunct="1">
-              <a:spcBef>
-                <a:spcPts val="1000"/>
-              </a:spcBef>
-              <a:spcAft>
-                <a:spcPts val="0"/>
-              </a:spcAft>
-              <a:buClr>
-                <a:schemeClr val="accent1"/>
-              </a:buClr>
-              <a:buSzPct val="80000"/>
-              <a:buFont typeface="Wingdings 3" charset="2"/>
-              <a:buChar char=""/>
-              <a:defRPr kumimoji="1" sz="1200" kern="1200">
-                <a:solidFill>
-                  <a:schemeClr val="tx1">
-                    <a:lumMod val="75000"/>
-                    <a:lumOff val="25000"/>
-                  </a:schemeClr>
-                </a:solidFill>
-                <a:latin typeface="+mn-lt"/>
-                <a:ea typeface="+mn-ea"/>
-                <a:cs typeface="+mn-cs"/>
-              </a:defRPr>
-            </a:lvl7pPr>
-            <a:lvl8pPr marL="3429000" indent="-228600" algn="l" defTabSz="457200" rtl="0" eaLnBrk="1" latinLnBrk="0" hangingPunct="1">
-              <a:spcBef>
-                <a:spcPts val="1000"/>
-              </a:spcBef>
-              <a:spcAft>
-                <a:spcPts val="0"/>
-              </a:spcAft>
-              <a:buClr>
-                <a:schemeClr val="accent1"/>
-              </a:buClr>
-              <a:buSzPct val="80000"/>
-              <a:buFont typeface="Wingdings 3" charset="2"/>
-              <a:buChar char=""/>
-              <a:defRPr kumimoji="1" sz="1200" kern="1200">
-                <a:solidFill>
-                  <a:schemeClr val="tx1">
-                    <a:lumMod val="75000"/>
-                    <a:lumOff val="25000"/>
-                  </a:schemeClr>
-                </a:solidFill>
-                <a:latin typeface="+mn-lt"/>
-                <a:ea typeface="+mn-ea"/>
-                <a:cs typeface="+mn-cs"/>
-              </a:defRPr>
-            </a:lvl8pPr>
-            <a:lvl9pPr marL="3886200" indent="-228600" algn="l" defTabSz="457200" rtl="0" eaLnBrk="1" latinLnBrk="0" hangingPunct="1">
-              <a:spcBef>
-                <a:spcPts val="1000"/>
-              </a:spcBef>
-              <a:spcAft>
-                <a:spcPts val="0"/>
-              </a:spcAft>
-              <a:buClr>
-                <a:schemeClr val="accent1"/>
-              </a:buClr>
-              <a:buSzPct val="80000"/>
-              <a:buFont typeface="Wingdings 3" charset="2"/>
-              <a:buChar char=""/>
-              <a:defRPr kumimoji="1" sz="1200" kern="1200">
-                <a:solidFill>
-                  <a:schemeClr val="tx1">
-                    <a:lumMod val="75000"/>
-                    <a:lumOff val="25000"/>
-                  </a:schemeClr>
-                </a:solidFill>
-                <a:latin typeface="+mn-lt"/>
-                <a:ea typeface="+mn-ea"/>
-                <a:cs typeface="+mn-cs"/>
-              </a:defRPr>
-            </a:lvl9pPr>
-          </a:lstStyle>
-          <a:p>
-            <a:r>
-              <a:rPr lang="ja-JP" altLang="en-US" sz="3200" b="1" u="sng" dirty="0"/>
-              <a:t>今回の範囲</a:t>
-            </a:r>
-            <a:endParaRPr lang="en-US" altLang="ja-JP" sz="3200" b="1" u="sng" dirty="0"/>
-          </a:p>
-          <a:p>
-            <a:pPr marL="0" indent="0">
-              <a:buFont typeface="Wingdings 3" charset="2"/>
-              <a:buNone/>
-            </a:pPr>
-            <a:r>
-              <a:rPr lang="ja-JP" altLang="en-US" sz="2800" dirty="0"/>
-              <a:t>・</a:t>
-            </a:r>
-            <a:r>
-              <a:rPr lang="en-US" altLang="ja-JP" sz="2800" dirty="0"/>
-              <a:t>Unity</a:t>
-            </a:r>
-            <a:r>
-              <a:rPr lang="ja-JP" altLang="en-US" sz="2800" dirty="0"/>
-              <a:t>：スライド</a:t>
-            </a:r>
-            <a:endParaRPr lang="en-US" altLang="ja-JP" sz="2800" dirty="0"/>
-          </a:p>
-          <a:p>
-            <a:pPr marL="0" indent="0">
-              <a:buFont typeface="Wingdings 3" charset="2"/>
-              <a:buNone/>
-            </a:pPr>
-            <a:r>
-              <a:rPr lang="ja-JP" altLang="en-US" sz="2800" dirty="0"/>
-              <a:t>・課題 </a:t>
-            </a:r>
-            <a:r>
-              <a:rPr lang="en-US" altLang="ja-JP" sz="2800" dirty="0"/>
-              <a:t>: </a:t>
-            </a:r>
-            <a:r>
-              <a:rPr lang="ja-JP" altLang="en-US" sz="2800" dirty="0"/>
-              <a:t>スライド</a:t>
-            </a:r>
-            <a:endParaRPr lang="en-US" altLang="ja-JP" sz="2800" dirty="0"/>
-          </a:p>
-          <a:p>
-            <a:pPr marL="0" indent="0">
-              <a:buNone/>
-            </a:pPr>
-            <a:endParaRPr lang="en-US" altLang="ja-JP" sz="3200" dirty="0"/>
-          </a:p>
-          <a:p>
-            <a:endParaRPr lang="ja-JP" altLang="en-US" sz="3200" dirty="0"/>
-          </a:p>
-        </p:txBody>
-      </p:sp>
-      <p:sp>
-        <p:nvSpPr>
           <p:cNvPr id="2" name="テキスト ボックス 1">
             <a:extLst>
               <a:ext uri="{FF2B5EF4-FFF2-40B4-BE49-F238E27FC236}">
@@ -12482,7 +11706,7 @@
               <a:buNone/>
             </a:pPr>
             <a:r>
-              <a:rPr lang="ja-JP" altLang="en-US" sz="2800"/>
+              <a:rPr lang="ja-JP" altLang="en-US" sz="2800" dirty="0"/>
               <a:t>・正しい回転は正しいやり方で。</a:t>
             </a:r>
             <a:endParaRPr lang="en-US" altLang="ja-JP" sz="2800" dirty="0"/>
